--- a/slides/01-intro.pptx
+++ b/slides/01-intro.pptx
@@ -213,7 +213,7 @@
           <a:p>
             <a:fld id="{15DA2908-672F-DC48-8CAD-AEE711B947DA}" type="datetimeFigureOut">
               <a:rPr lang="en-US" smtClean="0"/>
-              <a:t>6/30/25</a:t>
+              <a:t>7/27/26</a:t>
             </a:fld>
             <a:endParaRPr lang="en-US"/>
           </a:p>
@@ -1455,6 +1455,13 @@
               </a:ext>
             </a:extLst>
           </p:spPr>
+          <p:txBody>
+            <a:bodyPr/>
+            <a:lstStyle/>
+            <a:p>
+              <a:endParaRPr lang="en-US"/>
+            </a:p>
+          </p:txBody>
         </p:sp>
         <p:sp>
           <p:nvSpPr>
@@ -1523,6 +1530,13 @@
               </a:ext>
             </a:extLst>
           </p:spPr>
+          <p:txBody>
+            <a:bodyPr/>
+            <a:lstStyle/>
+            <a:p>
+              <a:endParaRPr lang="en-US"/>
+            </a:p>
+          </p:txBody>
         </p:sp>
         <p:sp>
           <p:nvSpPr>
@@ -1596,6 +1610,13 @@
               </a:ext>
             </a:extLst>
           </p:spPr>
+          <p:txBody>
+            <a:bodyPr/>
+            <a:lstStyle/>
+            <a:p>
+              <a:endParaRPr lang="en-US"/>
+            </a:p>
+          </p:txBody>
         </p:sp>
         <p:sp>
           <p:nvSpPr>
@@ -1659,6 +1680,13 @@
               </a:ext>
             </a:extLst>
           </p:spPr>
+          <p:txBody>
+            <a:bodyPr/>
+            <a:lstStyle/>
+            <a:p>
+              <a:endParaRPr lang="en-US"/>
+            </a:p>
+          </p:txBody>
         </p:sp>
         <p:sp>
           <p:nvSpPr>
@@ -1712,6 +1740,13 @@
               </a:ext>
             </a:extLst>
           </p:spPr>
+          <p:txBody>
+            <a:bodyPr/>
+            <a:lstStyle/>
+            <a:p>
+              <a:endParaRPr lang="en-US"/>
+            </a:p>
+          </p:txBody>
         </p:sp>
         <p:sp>
           <p:nvSpPr>
@@ -1775,6 +1810,13 @@
               </a:ext>
             </a:extLst>
           </p:spPr>
+          <p:txBody>
+            <a:bodyPr/>
+            <a:lstStyle/>
+            <a:p>
+              <a:endParaRPr lang="en-US"/>
+            </a:p>
+          </p:txBody>
         </p:sp>
         <p:sp>
           <p:nvSpPr>
@@ -1833,6 +1875,13 @@
               </a:ext>
             </a:extLst>
           </p:spPr>
+          <p:txBody>
+            <a:bodyPr/>
+            <a:lstStyle/>
+            <a:p>
+              <a:endParaRPr lang="en-US"/>
+            </a:p>
+          </p:txBody>
         </p:sp>
         <p:sp>
           <p:nvSpPr>
@@ -1886,6 +1935,13 @@
               </a:ext>
             </a:extLst>
           </p:spPr>
+          <p:txBody>
+            <a:bodyPr/>
+            <a:lstStyle/>
+            <a:p>
+              <a:endParaRPr lang="en-US"/>
+            </a:p>
+          </p:txBody>
         </p:sp>
         <p:sp>
           <p:nvSpPr>
@@ -1944,6 +2000,13 @@
               </a:ext>
             </a:extLst>
           </p:spPr>
+          <p:txBody>
+            <a:bodyPr/>
+            <a:lstStyle/>
+            <a:p>
+              <a:endParaRPr lang="en-US"/>
+            </a:p>
+          </p:txBody>
         </p:sp>
         <p:sp>
           <p:nvSpPr>
@@ -1997,6 +2060,13 @@
               </a:ext>
             </a:extLst>
           </p:spPr>
+          <p:txBody>
+            <a:bodyPr/>
+            <a:lstStyle/>
+            <a:p>
+              <a:endParaRPr lang="en-US"/>
+            </a:p>
+          </p:txBody>
         </p:sp>
         <p:sp>
           <p:nvSpPr>
@@ -2055,6 +2125,13 @@
               </a:ext>
             </a:extLst>
           </p:spPr>
+          <p:txBody>
+            <a:bodyPr/>
+            <a:lstStyle/>
+            <a:p>
+              <a:endParaRPr lang="en-US"/>
+            </a:p>
+          </p:txBody>
         </p:sp>
         <p:sp>
           <p:nvSpPr>
@@ -2108,6 +2185,13 @@
               </a:ext>
             </a:extLst>
           </p:spPr>
+          <p:txBody>
+            <a:bodyPr/>
+            <a:lstStyle/>
+            <a:p>
+              <a:endParaRPr lang="en-US"/>
+            </a:p>
+          </p:txBody>
         </p:sp>
         <p:sp>
           <p:nvSpPr>
@@ -2166,6 +2250,13 @@
               </a:ext>
             </a:extLst>
           </p:spPr>
+          <p:txBody>
+            <a:bodyPr/>
+            <a:lstStyle/>
+            <a:p>
+              <a:endParaRPr lang="en-US"/>
+            </a:p>
+          </p:txBody>
         </p:sp>
         <p:sp>
           <p:nvSpPr>
@@ -2224,6 +2315,13 @@
               </a:ext>
             </a:extLst>
           </p:spPr>
+          <p:txBody>
+            <a:bodyPr/>
+            <a:lstStyle/>
+            <a:p>
+              <a:endParaRPr lang="en-US"/>
+            </a:p>
+          </p:txBody>
         </p:sp>
         <p:sp>
           <p:nvSpPr>
@@ -2282,6 +2380,13 @@
               </a:ext>
             </a:extLst>
           </p:spPr>
+          <p:txBody>
+            <a:bodyPr/>
+            <a:lstStyle/>
+            <a:p>
+              <a:endParaRPr lang="en-US"/>
+            </a:p>
+          </p:txBody>
         </p:sp>
         <p:sp>
           <p:nvSpPr>
@@ -2335,6 +2440,13 @@
               </a:ext>
             </a:extLst>
           </p:spPr>
+          <p:txBody>
+            <a:bodyPr/>
+            <a:lstStyle/>
+            <a:p>
+              <a:endParaRPr lang="en-US"/>
+            </a:p>
+          </p:txBody>
         </p:sp>
         <p:sp>
           <p:nvSpPr>
@@ -2388,6 +2500,13 @@
               </a:ext>
             </a:extLst>
           </p:spPr>
+          <p:txBody>
+            <a:bodyPr/>
+            <a:lstStyle/>
+            <a:p>
+              <a:endParaRPr lang="en-US"/>
+            </a:p>
+          </p:txBody>
         </p:sp>
         <p:sp>
           <p:nvSpPr>
@@ -2441,6 +2560,13 @@
               </a:ext>
             </a:extLst>
           </p:spPr>
+          <p:txBody>
+            <a:bodyPr/>
+            <a:lstStyle/>
+            <a:p>
+              <a:endParaRPr lang="en-US"/>
+            </a:p>
+          </p:txBody>
         </p:sp>
         <p:sp>
           <p:nvSpPr>
@@ -2494,6 +2620,13 @@
               </a:ext>
             </a:extLst>
           </p:spPr>
+          <p:txBody>
+            <a:bodyPr/>
+            <a:lstStyle/>
+            <a:p>
+              <a:endParaRPr lang="en-US"/>
+            </a:p>
+          </p:txBody>
         </p:sp>
       </p:grpSp>
       <p:grpSp>
@@ -2547,6 +2680,13 @@
               <a:schemeClr val="lt1"/>
             </a:fontRef>
           </p:style>
+          <p:txBody>
+            <a:bodyPr/>
+            <a:lstStyle/>
+            <a:p>
+              <a:endParaRPr lang="en-US"/>
+            </a:p>
+          </p:txBody>
         </p:sp>
         <p:sp>
           <p:nvSpPr>
@@ -2585,6 +2725,13 @@
               <a:schemeClr val="lt1"/>
             </a:fontRef>
           </p:style>
+          <p:txBody>
+            <a:bodyPr/>
+            <a:lstStyle/>
+            <a:p>
+              <a:endParaRPr lang="en-US"/>
+            </a:p>
+          </p:txBody>
         </p:sp>
         <p:sp>
           <p:nvSpPr>
@@ -2623,6 +2770,13 @@
               <a:schemeClr val="lt1"/>
             </a:fontRef>
           </p:style>
+          <p:txBody>
+            <a:bodyPr/>
+            <a:lstStyle/>
+            <a:p>
+              <a:endParaRPr lang="en-US"/>
+            </a:p>
+          </p:txBody>
         </p:sp>
       </p:grpSp>
       <p:sp>
@@ -2766,7 +2920,7 @@
           <a:p>
             <a:fld id="{F6CCBF3A-D7FB-4B97-8FD5-6FFB20CB1E84}" type="datetimeFigureOut">
               <a:rPr lang="en-US" smtClean="0"/>
-              <a:t>6/30/25</a:t>
+              <a:t>7/27/26</a:t>
             </a:fld>
             <a:endParaRPr lang="en-US"/>
           </a:p>
@@ -4225,7 +4379,7 @@
           <a:p>
             <a:fld id="{F6CCBF3A-D7FB-4B97-8FD5-6FFB20CB1E84}" type="datetimeFigureOut">
               <a:rPr lang="en-US" smtClean="0"/>
-              <a:t>6/30/25</a:t>
+              <a:t>7/27/26</a:t>
             </a:fld>
             <a:endParaRPr lang="en-US"/>
           </a:p>
@@ -5678,7 +5832,7 @@
           <a:p>
             <a:fld id="{F6CCBF3A-D7FB-4B97-8FD5-6FFB20CB1E84}" type="datetimeFigureOut">
               <a:rPr lang="en-US" smtClean="0"/>
-              <a:t>6/30/25</a:t>
+              <a:t>7/27/26</a:t>
             </a:fld>
             <a:endParaRPr lang="en-US"/>
           </a:p>
@@ -8053,7 +8207,7 @@
           <a:p>
             <a:fld id="{F6CCBF3A-D7FB-4B97-8FD5-6FFB20CB1E84}" type="datetimeFigureOut">
               <a:rPr lang="en-US" smtClean="0"/>
-              <a:t>6/30/25</a:t>
+              <a:t>7/27/26</a:t>
             </a:fld>
             <a:endParaRPr lang="en-US"/>
           </a:p>
@@ -9561,7 +9715,7 @@
           <a:p>
             <a:fld id="{F6CCBF3A-D7FB-4B97-8FD5-6FFB20CB1E84}" type="datetimeFigureOut">
               <a:rPr lang="en-US" smtClean="0"/>
-              <a:t>6/30/25</a:t>
+              <a:t>7/27/26</a:t>
             </a:fld>
             <a:endParaRPr lang="en-US"/>
           </a:p>
@@ -11082,7 +11236,7 @@
           <a:p>
             <a:fld id="{F6CCBF3A-D7FB-4B97-8FD5-6FFB20CB1E84}" type="datetimeFigureOut">
               <a:rPr lang="en-US" smtClean="0"/>
-              <a:t>6/30/25</a:t>
+              <a:t>7/27/26</a:t>
             </a:fld>
             <a:endParaRPr lang="en-US"/>
           </a:p>
@@ -12747,7 +12901,7 @@
           <a:p>
             <a:fld id="{F6CCBF3A-D7FB-4B97-8FD5-6FFB20CB1E84}" type="datetimeFigureOut">
               <a:rPr lang="en-US" smtClean="0"/>
-              <a:t>6/30/25</a:t>
+              <a:t>7/27/26</a:t>
             </a:fld>
             <a:endParaRPr lang="en-US"/>
           </a:p>
@@ -14145,7 +14299,7 @@
           <a:p>
             <a:fld id="{F6CCBF3A-D7FB-4B97-8FD5-6FFB20CB1E84}" type="datetimeFigureOut">
               <a:rPr lang="en-US" smtClean="0"/>
-              <a:t>6/30/25</a:t>
+              <a:t>7/27/26</a:t>
             </a:fld>
             <a:endParaRPr lang="en-US"/>
           </a:p>
@@ -14245,7 +14399,7 @@
           <a:p>
             <a:fld id="{F6CCBF3A-D7FB-4B97-8FD5-6FFB20CB1E84}" type="datetimeFigureOut">
               <a:rPr lang="en-US" smtClean="0"/>
-              <a:t>6/30/25</a:t>
+              <a:t>7/27/26</a:t>
             </a:fld>
             <a:endParaRPr lang="en-US"/>
           </a:p>
@@ -15771,7 +15925,7 @@
           <a:p>
             <a:fld id="{F6CCBF3A-D7FB-4B97-8FD5-6FFB20CB1E84}" type="datetimeFigureOut">
               <a:rPr lang="en-US" smtClean="0"/>
-              <a:t>6/30/25</a:t>
+              <a:t>7/27/26</a:t>
             </a:fld>
             <a:endParaRPr lang="en-US"/>
           </a:p>
@@ -17307,7 +17461,7 @@
           <a:p>
             <a:fld id="{F6CCBF3A-D7FB-4B97-8FD5-6FFB20CB1E84}" type="datetimeFigureOut">
               <a:rPr lang="en-US" smtClean="0"/>
-              <a:t>6/30/25</a:t>
+              <a:t>7/27/26</a:t>
             </a:fld>
             <a:endParaRPr lang="en-US"/>
           </a:p>
@@ -17530,7 +17684,7 @@
           <a:p>
             <a:fld id="{F6CCBF3A-D7FB-4B97-8FD5-6FFB20CB1E84}" type="datetimeFigureOut">
               <a:rPr lang="en-US" smtClean="0"/>
-              <a:t>6/30/25</a:t>
+              <a:t>7/27/26</a:t>
             </a:fld>
             <a:endParaRPr lang="en-US"/>
           </a:p>
